--- a/all-letters-dammah/12-kaf.pptx
+++ b/all-letters-dammah/12-kaf.pptx
@@ -3169,7 +3169,7 @@
                                           </p:endCondLst>
                                         </p:cTn>
                                         <p:tgtEl>
-                                          <p:sndTgt r:embed="rIdSnd1" name="pop.wav"/>
+                                          <p:sndTgt r:embed="rIdSnd1" name="pluck1.wav"/>
                                         </p:tgtEl>
                                       </p:cMediaNode>
                                     </p:audio>
@@ -3241,7 +3241,7 @@
                                           </p:endCondLst>
                                         </p:cTn>
                                         <p:tgtEl>
-                                          <p:sndTgt r:embed="rIdSnd2" name="ding.wav"/>
+                                          <p:sndTgt r:embed="rIdSnd2" name="bell1.wav"/>
                                         </p:tgtEl>
                                       </p:cMediaNode>
                                     </p:audio>
@@ -4079,7 +4079,7 @@
                                           </p:endCondLst>
                                         </p:cTn>
                                         <p:tgtEl>
-                                          <p:sndTgt r:embed="rIdSnd1" name="pop.wav"/>
+                                          <p:sndTgt r:embed="rIdSnd1" name="pluck1.wav"/>
                                         </p:tgtEl>
                                       </p:cMediaNode>
                                     </p:audio>
@@ -4151,7 +4151,7 @@
                                           </p:endCondLst>
                                         </p:cTn>
                                         <p:tgtEl>
-                                          <p:sndTgt r:embed="rIdSnd2" name="ding.wav"/>
+                                          <p:sndTgt r:embed="rIdSnd2" name="bell1.wav"/>
                                         </p:tgtEl>
                                       </p:cMediaNode>
                                     </p:audio>
@@ -4223,7 +4223,7 @@
                                           </p:endCondLst>
                                         </p:cTn>
                                         <p:tgtEl>
-                                          <p:sndTgt r:embed="rIdSnd3" name="tick.wav"/>
+                                          <p:sndTgt r:embed="rIdSnd3" name="bloop.wav"/>
                                         </p:tgtEl>
                                       </p:cMediaNode>
                                     </p:audio>
@@ -4295,7 +4295,7 @@
                                           </p:endCondLst>
                                         </p:cTn>
                                         <p:tgtEl>
-                                          <p:sndTgt r:embed="rIdSnd1" name="pop.wav"/>
+                                          <p:sndTgt r:embed="rIdSnd4" name="pluck2.wav"/>
                                         </p:tgtEl>
                                       </p:cMediaNode>
                                     </p:audio>
@@ -4367,7 +4367,7 @@
                                           </p:endCondLst>
                                         </p:cTn>
                                         <p:tgtEl>
-                                          <p:sndTgt r:embed="rIdSnd2" name="ding.wav"/>
+                                          <p:sndTgt r:embed="rIdSnd5" name="bell2.wav"/>
                                         </p:tgtEl>
                                       </p:cMediaNode>
                                     </p:audio>
@@ -4439,7 +4439,7 @@
                                           </p:endCondLst>
                                         </p:cTn>
                                         <p:tgtEl>
-                                          <p:sndTgt r:embed="rIdSnd3" name="tick.wav"/>
+                                          <p:sndTgt r:embed="rIdSnd3" name="bloop.wav"/>
                                         </p:tgtEl>
                                       </p:cMediaNode>
                                     </p:audio>
@@ -4511,7 +4511,7 @@
                                           </p:endCondLst>
                                         </p:cTn>
                                         <p:tgtEl>
-                                          <p:sndTgt r:embed="rIdSnd1" name="pop.wav"/>
+                                          <p:sndTgt r:embed="rIdSnd6" name="pluck3.wav"/>
                                         </p:tgtEl>
                                       </p:cMediaNode>
                                     </p:audio>
@@ -4583,7 +4583,7 @@
                                           </p:endCondLst>
                                         </p:cTn>
                                         <p:tgtEl>
-                                          <p:sndTgt r:embed="rIdSnd2" name="ding.wav"/>
+                                          <p:sndTgt r:embed="rIdSnd7" name="bell3.wav"/>
                                         </p:tgtEl>
                                       </p:cMediaNode>
                                     </p:audio>
@@ -4655,7 +4655,7 @@
                                           </p:endCondLst>
                                         </p:cTn>
                                         <p:tgtEl>
-                                          <p:sndTgt r:embed="rIdSnd3" name="tick.wav"/>
+                                          <p:sndTgt r:embed="rIdSnd8" name="whoosh.wav"/>
                                         </p:tgtEl>
                                       </p:cMediaNode>
                                     </p:audio>
@@ -4727,7 +4727,7 @@
                                           </p:endCondLst>
                                         </p:cTn>
                                         <p:tgtEl>
-                                          <p:sndTgt r:embed="rIdSnd4" name="win.wav"/>
+                                          <p:sndTgt r:embed="rIdSnd9" name="win.wav"/>
                                         </p:tgtEl>
                                       </p:cMediaNode>
                                     </p:audio>
@@ -5573,7 +5573,7 @@
                                           </p:endCondLst>
                                         </p:cTn>
                                         <p:tgtEl>
-                                          <p:sndTgt r:embed="rIdSnd1" name="pop.wav"/>
+                                          <p:sndTgt r:embed="rIdSnd1" name="pluck1.wav"/>
                                         </p:tgtEl>
                                       </p:cMediaNode>
                                     </p:audio>
@@ -5645,7 +5645,7 @@
                                           </p:endCondLst>
                                         </p:cTn>
                                         <p:tgtEl>
-                                          <p:sndTgt r:embed="rIdSnd2" name="ding.wav"/>
+                                          <p:sndTgt r:embed="rIdSnd2" name="bell1.wav"/>
                                         </p:tgtEl>
                                       </p:cMediaNode>
                                     </p:audio>
@@ -5717,7 +5717,7 @@
                                           </p:endCondLst>
                                         </p:cTn>
                                         <p:tgtEl>
-                                          <p:sndTgt r:embed="rIdSnd3" name="tick.wav"/>
+                                          <p:sndTgt r:embed="rIdSnd3" name="bloop.wav"/>
                                         </p:tgtEl>
                                       </p:cMediaNode>
                                     </p:audio>
@@ -5789,7 +5789,7 @@
                                           </p:endCondLst>
                                         </p:cTn>
                                         <p:tgtEl>
-                                          <p:sndTgt r:embed="rIdSnd1" name="pop.wav"/>
+                                          <p:sndTgt r:embed="rIdSnd4" name="pluck2.wav"/>
                                         </p:tgtEl>
                                       </p:cMediaNode>
                                     </p:audio>
@@ -5861,7 +5861,7 @@
                                           </p:endCondLst>
                                         </p:cTn>
                                         <p:tgtEl>
-                                          <p:sndTgt r:embed="rIdSnd2" name="ding.wav"/>
+                                          <p:sndTgt r:embed="rIdSnd5" name="bell2.wav"/>
                                         </p:tgtEl>
                                       </p:cMediaNode>
                                     </p:audio>
@@ -5933,7 +5933,7 @@
                                           </p:endCondLst>
                                         </p:cTn>
                                         <p:tgtEl>
-                                          <p:sndTgt r:embed="rIdSnd3" name="tick.wav"/>
+                                          <p:sndTgt r:embed="rIdSnd3" name="bloop.wav"/>
                                         </p:tgtEl>
                                       </p:cMediaNode>
                                     </p:audio>
@@ -6005,7 +6005,7 @@
                                           </p:endCondLst>
                                         </p:cTn>
                                         <p:tgtEl>
-                                          <p:sndTgt r:embed="rIdSnd1" name="pop.wav"/>
+                                          <p:sndTgt r:embed="rIdSnd6" name="pluck3.wav"/>
                                         </p:tgtEl>
                                       </p:cMediaNode>
                                     </p:audio>
@@ -6077,7 +6077,7 @@
                                           </p:endCondLst>
                                         </p:cTn>
                                         <p:tgtEl>
-                                          <p:sndTgt r:embed="rIdSnd2" name="ding.wav"/>
+                                          <p:sndTgt r:embed="rIdSnd7" name="bell3.wav"/>
                                         </p:tgtEl>
                                       </p:cMediaNode>
                                     </p:audio>
@@ -6149,7 +6149,7 @@
                                           </p:endCondLst>
                                         </p:cTn>
                                         <p:tgtEl>
-                                          <p:sndTgt r:embed="rIdSnd3" name="tick.wav"/>
+                                          <p:sndTgt r:embed="rIdSnd8" name="whoosh.wav"/>
                                         </p:tgtEl>
                                       </p:cMediaNode>
                                     </p:audio>
@@ -6221,7 +6221,7 @@
                                           </p:endCondLst>
                                         </p:cTn>
                                         <p:tgtEl>
-                                          <p:sndTgt r:embed="rIdSnd4" name="win.wav"/>
+                                          <p:sndTgt r:embed="rIdSnd9" name="win.wav"/>
                                         </p:tgtEl>
                                       </p:cMediaNode>
                                     </p:audio>
@@ -7067,7 +7067,7 @@
                                           </p:endCondLst>
                                         </p:cTn>
                                         <p:tgtEl>
-                                          <p:sndTgt r:embed="rIdSnd1" name="pop.wav"/>
+                                          <p:sndTgt r:embed="rIdSnd1" name="pluck1.wav"/>
                                         </p:tgtEl>
                                       </p:cMediaNode>
                                     </p:audio>
@@ -7139,7 +7139,7 @@
                                           </p:endCondLst>
                                         </p:cTn>
                                         <p:tgtEl>
-                                          <p:sndTgt r:embed="rIdSnd2" name="ding.wav"/>
+                                          <p:sndTgt r:embed="rIdSnd2" name="bell1.wav"/>
                                         </p:tgtEl>
                                       </p:cMediaNode>
                                     </p:audio>
@@ -7211,7 +7211,7 @@
                                           </p:endCondLst>
                                         </p:cTn>
                                         <p:tgtEl>
-                                          <p:sndTgt r:embed="rIdSnd3" name="tick.wav"/>
+                                          <p:sndTgt r:embed="rIdSnd3" name="bloop.wav"/>
                                         </p:tgtEl>
                                       </p:cMediaNode>
                                     </p:audio>
@@ -7283,7 +7283,7 @@
                                           </p:endCondLst>
                                         </p:cTn>
                                         <p:tgtEl>
-                                          <p:sndTgt r:embed="rIdSnd1" name="pop.wav"/>
+                                          <p:sndTgt r:embed="rIdSnd4" name="pluck2.wav"/>
                                         </p:tgtEl>
                                       </p:cMediaNode>
                                     </p:audio>
@@ -7355,7 +7355,7 @@
                                           </p:endCondLst>
                                         </p:cTn>
                                         <p:tgtEl>
-                                          <p:sndTgt r:embed="rIdSnd2" name="ding.wav"/>
+                                          <p:sndTgt r:embed="rIdSnd5" name="bell2.wav"/>
                                         </p:tgtEl>
                                       </p:cMediaNode>
                                     </p:audio>
@@ -7427,7 +7427,7 @@
                                           </p:endCondLst>
                                         </p:cTn>
                                         <p:tgtEl>
-                                          <p:sndTgt r:embed="rIdSnd3" name="tick.wav"/>
+                                          <p:sndTgt r:embed="rIdSnd3" name="bloop.wav"/>
                                         </p:tgtEl>
                                       </p:cMediaNode>
                                     </p:audio>
@@ -7499,7 +7499,7 @@
                                           </p:endCondLst>
                                         </p:cTn>
                                         <p:tgtEl>
-                                          <p:sndTgt r:embed="rIdSnd1" name="pop.wav"/>
+                                          <p:sndTgt r:embed="rIdSnd6" name="pluck3.wav"/>
                                         </p:tgtEl>
                                       </p:cMediaNode>
                                     </p:audio>
@@ -7571,7 +7571,7 @@
                                           </p:endCondLst>
                                         </p:cTn>
                                         <p:tgtEl>
-                                          <p:sndTgt r:embed="rIdSnd2" name="ding.wav"/>
+                                          <p:sndTgt r:embed="rIdSnd7" name="bell3.wav"/>
                                         </p:tgtEl>
                                       </p:cMediaNode>
                                     </p:audio>
@@ -7643,7 +7643,7 @@
                                           </p:endCondLst>
                                         </p:cTn>
                                         <p:tgtEl>
-                                          <p:sndTgt r:embed="rIdSnd3" name="tick.wav"/>
+                                          <p:sndTgt r:embed="rIdSnd8" name="whoosh.wav"/>
                                         </p:tgtEl>
                                       </p:cMediaNode>
                                     </p:audio>
@@ -7715,7 +7715,7 @@
                                           </p:endCondLst>
                                         </p:cTn>
                                         <p:tgtEl>
-                                          <p:sndTgt r:embed="rIdSnd4" name="win.wav"/>
+                                          <p:sndTgt r:embed="rIdSnd9" name="win.wav"/>
                                         </p:tgtEl>
                                       </p:cMediaNode>
                                     </p:audio>
@@ -8561,7 +8561,7 @@
                                           </p:endCondLst>
                                         </p:cTn>
                                         <p:tgtEl>
-                                          <p:sndTgt r:embed="rIdSnd1" name="pop.wav"/>
+                                          <p:sndTgt r:embed="rIdSnd1" name="pluck1.wav"/>
                                         </p:tgtEl>
                                       </p:cMediaNode>
                                     </p:audio>
@@ -8633,7 +8633,7 @@
                                           </p:endCondLst>
                                         </p:cTn>
                                         <p:tgtEl>
-                                          <p:sndTgt r:embed="rIdSnd2" name="ding.wav"/>
+                                          <p:sndTgt r:embed="rIdSnd2" name="bell1.wav"/>
                                         </p:tgtEl>
                                       </p:cMediaNode>
                                     </p:audio>
@@ -8705,7 +8705,7 @@
                                           </p:endCondLst>
                                         </p:cTn>
                                         <p:tgtEl>
-                                          <p:sndTgt r:embed="rIdSnd3" name="tick.wav"/>
+                                          <p:sndTgt r:embed="rIdSnd3" name="bloop.wav"/>
                                         </p:tgtEl>
                                       </p:cMediaNode>
                                     </p:audio>
@@ -8777,7 +8777,7 @@
                                           </p:endCondLst>
                                         </p:cTn>
                                         <p:tgtEl>
-                                          <p:sndTgt r:embed="rIdSnd1" name="pop.wav"/>
+                                          <p:sndTgt r:embed="rIdSnd4" name="pluck2.wav"/>
                                         </p:tgtEl>
                                       </p:cMediaNode>
                                     </p:audio>
@@ -8849,7 +8849,7 @@
                                           </p:endCondLst>
                                         </p:cTn>
                                         <p:tgtEl>
-                                          <p:sndTgt r:embed="rIdSnd2" name="ding.wav"/>
+                                          <p:sndTgt r:embed="rIdSnd5" name="bell2.wav"/>
                                         </p:tgtEl>
                                       </p:cMediaNode>
                                     </p:audio>
@@ -8921,7 +8921,7 @@
                                           </p:endCondLst>
                                         </p:cTn>
                                         <p:tgtEl>
-                                          <p:sndTgt r:embed="rIdSnd3" name="tick.wav"/>
+                                          <p:sndTgt r:embed="rIdSnd3" name="bloop.wav"/>
                                         </p:tgtEl>
                                       </p:cMediaNode>
                                     </p:audio>
@@ -8993,7 +8993,7 @@
                                           </p:endCondLst>
                                         </p:cTn>
                                         <p:tgtEl>
-                                          <p:sndTgt r:embed="rIdSnd1" name="pop.wav"/>
+                                          <p:sndTgt r:embed="rIdSnd6" name="pluck3.wav"/>
                                         </p:tgtEl>
                                       </p:cMediaNode>
                                     </p:audio>
@@ -9065,7 +9065,7 @@
                                           </p:endCondLst>
                                         </p:cTn>
                                         <p:tgtEl>
-                                          <p:sndTgt r:embed="rIdSnd2" name="ding.wav"/>
+                                          <p:sndTgt r:embed="rIdSnd7" name="bell3.wav"/>
                                         </p:tgtEl>
                                       </p:cMediaNode>
                                     </p:audio>
@@ -9137,7 +9137,7 @@
                                           </p:endCondLst>
                                         </p:cTn>
                                         <p:tgtEl>
-                                          <p:sndTgt r:embed="rIdSnd3" name="tick.wav"/>
+                                          <p:sndTgt r:embed="rIdSnd8" name="whoosh.wav"/>
                                         </p:tgtEl>
                                       </p:cMediaNode>
                                     </p:audio>
@@ -9209,7 +9209,7 @@
                                           </p:endCondLst>
                                         </p:cTn>
                                         <p:tgtEl>
-                                          <p:sndTgt r:embed="rIdSnd4" name="win.wav"/>
+                                          <p:sndTgt r:embed="rIdSnd9" name="win.wav"/>
                                         </p:tgtEl>
                                       </p:cMediaNode>
                                     </p:audio>
@@ -10055,7 +10055,7 @@
                                           </p:endCondLst>
                                         </p:cTn>
                                         <p:tgtEl>
-                                          <p:sndTgt r:embed="rIdSnd1" name="pop.wav"/>
+                                          <p:sndTgt r:embed="rIdSnd1" name="pluck1.wav"/>
                                         </p:tgtEl>
                                       </p:cMediaNode>
                                     </p:audio>
@@ -10127,7 +10127,7 @@
                                           </p:endCondLst>
                                         </p:cTn>
                                         <p:tgtEl>
-                                          <p:sndTgt r:embed="rIdSnd2" name="ding.wav"/>
+                                          <p:sndTgt r:embed="rIdSnd2" name="bell1.wav"/>
                                         </p:tgtEl>
                                       </p:cMediaNode>
                                     </p:audio>
@@ -10199,7 +10199,7 @@
                                           </p:endCondLst>
                                         </p:cTn>
                                         <p:tgtEl>
-                                          <p:sndTgt r:embed="rIdSnd3" name="tick.wav"/>
+                                          <p:sndTgt r:embed="rIdSnd3" name="bloop.wav"/>
                                         </p:tgtEl>
                                       </p:cMediaNode>
                                     </p:audio>
@@ -10271,7 +10271,7 @@
                                           </p:endCondLst>
                                         </p:cTn>
                                         <p:tgtEl>
-                                          <p:sndTgt r:embed="rIdSnd1" name="pop.wav"/>
+                                          <p:sndTgt r:embed="rIdSnd4" name="pluck2.wav"/>
                                         </p:tgtEl>
                                       </p:cMediaNode>
                                     </p:audio>
@@ -10343,7 +10343,7 @@
                                           </p:endCondLst>
                                         </p:cTn>
                                         <p:tgtEl>
-                                          <p:sndTgt r:embed="rIdSnd2" name="ding.wav"/>
+                                          <p:sndTgt r:embed="rIdSnd5" name="bell2.wav"/>
                                         </p:tgtEl>
                                       </p:cMediaNode>
                                     </p:audio>
@@ -10415,7 +10415,7 @@
                                           </p:endCondLst>
                                         </p:cTn>
                                         <p:tgtEl>
-                                          <p:sndTgt r:embed="rIdSnd3" name="tick.wav"/>
+                                          <p:sndTgt r:embed="rIdSnd3" name="bloop.wav"/>
                                         </p:tgtEl>
                                       </p:cMediaNode>
                                     </p:audio>
@@ -10487,7 +10487,7 @@
                                           </p:endCondLst>
                                         </p:cTn>
                                         <p:tgtEl>
-                                          <p:sndTgt r:embed="rIdSnd1" name="pop.wav"/>
+                                          <p:sndTgt r:embed="rIdSnd6" name="pluck3.wav"/>
                                         </p:tgtEl>
                                       </p:cMediaNode>
                                     </p:audio>
@@ -10559,7 +10559,7 @@
                                           </p:endCondLst>
                                         </p:cTn>
                                         <p:tgtEl>
-                                          <p:sndTgt r:embed="rIdSnd2" name="ding.wav"/>
+                                          <p:sndTgt r:embed="rIdSnd7" name="bell3.wav"/>
                                         </p:tgtEl>
                                       </p:cMediaNode>
                                     </p:audio>
@@ -10631,7 +10631,7 @@
                                           </p:endCondLst>
                                         </p:cTn>
                                         <p:tgtEl>
-                                          <p:sndTgt r:embed="rIdSnd3" name="tick.wav"/>
+                                          <p:sndTgt r:embed="rIdSnd8" name="whoosh.wav"/>
                                         </p:tgtEl>
                                       </p:cMediaNode>
                                     </p:audio>
@@ -10703,7 +10703,7 @@
                                           </p:endCondLst>
                                         </p:cTn>
                                         <p:tgtEl>
-                                          <p:sndTgt r:embed="rIdSnd4" name="win.wav"/>
+                                          <p:sndTgt r:embed="rIdSnd9" name="win.wav"/>
                                         </p:tgtEl>
                                       </p:cMediaNode>
                                     </p:audio>
@@ -11549,7 +11549,7 @@
                                           </p:endCondLst>
                                         </p:cTn>
                                         <p:tgtEl>
-                                          <p:sndTgt r:embed="rIdSnd1" name="pop.wav"/>
+                                          <p:sndTgt r:embed="rIdSnd1" name="pluck1.wav"/>
                                         </p:tgtEl>
                                       </p:cMediaNode>
                                     </p:audio>
@@ -11621,7 +11621,7 @@
                                           </p:endCondLst>
                                         </p:cTn>
                                         <p:tgtEl>
-                                          <p:sndTgt r:embed="rIdSnd2" name="ding.wav"/>
+                                          <p:sndTgt r:embed="rIdSnd2" name="bell1.wav"/>
                                         </p:tgtEl>
                                       </p:cMediaNode>
                                     </p:audio>
@@ -11693,7 +11693,7 @@
                                           </p:endCondLst>
                                         </p:cTn>
                                         <p:tgtEl>
-                                          <p:sndTgt r:embed="rIdSnd3" name="tick.wav"/>
+                                          <p:sndTgt r:embed="rIdSnd3" name="bloop.wav"/>
                                         </p:tgtEl>
                                       </p:cMediaNode>
                                     </p:audio>
@@ -11765,7 +11765,7 @@
                                           </p:endCondLst>
                                         </p:cTn>
                                         <p:tgtEl>
-                                          <p:sndTgt r:embed="rIdSnd1" name="pop.wav"/>
+                                          <p:sndTgt r:embed="rIdSnd4" name="pluck2.wav"/>
                                         </p:tgtEl>
                                       </p:cMediaNode>
                                     </p:audio>
@@ -11837,7 +11837,7 @@
                                           </p:endCondLst>
                                         </p:cTn>
                                         <p:tgtEl>
-                                          <p:sndTgt r:embed="rIdSnd2" name="ding.wav"/>
+                                          <p:sndTgt r:embed="rIdSnd5" name="bell2.wav"/>
                                         </p:tgtEl>
                                       </p:cMediaNode>
                                     </p:audio>
@@ -11909,7 +11909,7 @@
                                           </p:endCondLst>
                                         </p:cTn>
                                         <p:tgtEl>
-                                          <p:sndTgt r:embed="rIdSnd3" name="tick.wav"/>
+                                          <p:sndTgt r:embed="rIdSnd3" name="bloop.wav"/>
                                         </p:tgtEl>
                                       </p:cMediaNode>
                                     </p:audio>
@@ -11981,7 +11981,7 @@
                                           </p:endCondLst>
                                         </p:cTn>
                                         <p:tgtEl>
-                                          <p:sndTgt r:embed="rIdSnd1" name="pop.wav"/>
+                                          <p:sndTgt r:embed="rIdSnd6" name="pluck3.wav"/>
                                         </p:tgtEl>
                                       </p:cMediaNode>
                                     </p:audio>
@@ -12053,7 +12053,7 @@
                                           </p:endCondLst>
                                         </p:cTn>
                                         <p:tgtEl>
-                                          <p:sndTgt r:embed="rIdSnd2" name="ding.wav"/>
+                                          <p:sndTgt r:embed="rIdSnd7" name="bell3.wav"/>
                                         </p:tgtEl>
                                       </p:cMediaNode>
                                     </p:audio>
@@ -12125,7 +12125,7 @@
                                           </p:endCondLst>
                                         </p:cTn>
                                         <p:tgtEl>
-                                          <p:sndTgt r:embed="rIdSnd3" name="tick.wav"/>
+                                          <p:sndTgt r:embed="rIdSnd8" name="whoosh.wav"/>
                                         </p:tgtEl>
                                       </p:cMediaNode>
                                     </p:audio>
@@ -12197,7 +12197,7 @@
                                           </p:endCondLst>
                                         </p:cTn>
                                         <p:tgtEl>
-                                          <p:sndTgt r:embed="rIdSnd4" name="win.wav"/>
+                                          <p:sndTgt r:embed="rIdSnd9" name="win.wav"/>
                                         </p:tgtEl>
                                       </p:cMediaNode>
                                     </p:audio>
@@ -12915,7 +12915,7 @@
                                           </p:endCondLst>
                                         </p:cTn>
                                         <p:tgtEl>
-                                          <p:sndTgt r:embed="rIdSnd1" name="pop.wav"/>
+                                          <p:sndTgt r:embed="rIdSnd1" name="pluck1.wav"/>
                                         </p:tgtEl>
                                       </p:cMediaNode>
                                     </p:audio>
@@ -12987,7 +12987,7 @@
                                           </p:endCondLst>
                                         </p:cTn>
                                         <p:tgtEl>
-                                          <p:sndTgt r:embed="rIdSnd2" name="ding.wav"/>
+                                          <p:sndTgt r:embed="rIdSnd2" name="bell1.wav"/>
                                         </p:tgtEl>
                                       </p:cMediaNode>
                                     </p:audio>
@@ -13059,7 +13059,7 @@
                                           </p:endCondLst>
                                         </p:cTn>
                                         <p:tgtEl>
-                                          <p:sndTgt r:embed="rIdSnd3" name="tick.wav"/>
+                                          <p:sndTgt r:embed="rIdSnd3" name="bloop.wav"/>
                                         </p:tgtEl>
                                       </p:cMediaNode>
                                     </p:audio>
@@ -13131,7 +13131,7 @@
                                           </p:endCondLst>
                                         </p:cTn>
                                         <p:tgtEl>
-                                          <p:sndTgt r:embed="rIdSnd1" name="pop.wav"/>
+                                          <p:sndTgt r:embed="rIdSnd4" name="pluck2.wav"/>
                                         </p:tgtEl>
                                       </p:cMediaNode>
                                     </p:audio>
@@ -13203,7 +13203,7 @@
                                           </p:endCondLst>
                                         </p:cTn>
                                         <p:tgtEl>
-                                          <p:sndTgt r:embed="rIdSnd2" name="ding.wav"/>
+                                          <p:sndTgt r:embed="rIdSnd5" name="bell2.wav"/>
                                         </p:tgtEl>
                                       </p:cMediaNode>
                                     </p:audio>
@@ -13275,7 +13275,7 @@
                                           </p:endCondLst>
                                         </p:cTn>
                                         <p:tgtEl>
-                                          <p:sndTgt r:embed="rIdSnd3" name="tick.wav"/>
+                                          <p:sndTgt r:embed="rIdSnd6" name="whoosh.wav"/>
                                         </p:tgtEl>
                                       </p:cMediaNode>
                                     </p:audio>
@@ -13347,7 +13347,7 @@
                                           </p:endCondLst>
                                         </p:cTn>
                                         <p:tgtEl>
-                                          <p:sndTgt r:embed="rIdSnd4" name="win.wav"/>
+                                          <p:sndTgt r:embed="rIdSnd7" name="win.wav"/>
                                         </p:tgtEl>
                                       </p:cMediaNode>
                                     </p:audio>
@@ -14062,7 +14062,7 @@
                                           </p:endCondLst>
                                         </p:cTn>
                                         <p:tgtEl>
-                                          <p:sndTgt r:embed="rIdSnd1" name="pop.wav"/>
+                                          <p:sndTgt r:embed="rIdSnd1" name="pluck1.wav"/>
                                         </p:tgtEl>
                                       </p:cMediaNode>
                                     </p:audio>
@@ -14134,7 +14134,7 @@
                                           </p:endCondLst>
                                         </p:cTn>
                                         <p:tgtEl>
-                                          <p:sndTgt r:embed="rIdSnd2" name="ding.wav"/>
+                                          <p:sndTgt r:embed="rIdSnd2" name="bell1.wav"/>
                                         </p:tgtEl>
                                       </p:cMediaNode>
                                     </p:audio>
@@ -14206,7 +14206,7 @@
                                           </p:endCondLst>
                                         </p:cTn>
                                         <p:tgtEl>
-                                          <p:sndTgt r:embed="rIdSnd3" name="tick.wav"/>
+                                          <p:sndTgt r:embed="rIdSnd3" name="bloop.wav"/>
                                         </p:tgtEl>
                                       </p:cMediaNode>
                                     </p:audio>
@@ -14278,7 +14278,7 @@
                                           </p:endCondLst>
                                         </p:cTn>
                                         <p:tgtEl>
-                                          <p:sndTgt r:embed="rIdSnd1" name="pop.wav"/>
+                                          <p:sndTgt r:embed="rIdSnd4" name="pluck2.wav"/>
                                         </p:tgtEl>
                                       </p:cMediaNode>
                                     </p:audio>
@@ -14350,7 +14350,7 @@
                                           </p:endCondLst>
                                         </p:cTn>
                                         <p:tgtEl>
-                                          <p:sndTgt r:embed="rIdSnd2" name="ding.wav"/>
+                                          <p:sndTgt r:embed="rIdSnd5" name="bell2.wav"/>
                                         </p:tgtEl>
                                       </p:cMediaNode>
                                     </p:audio>
@@ -14422,7 +14422,7 @@
                                           </p:endCondLst>
                                         </p:cTn>
                                         <p:tgtEl>
-                                          <p:sndTgt r:embed="rIdSnd3" name="tick.wav"/>
+                                          <p:sndTgt r:embed="rIdSnd6" name="whoosh.wav"/>
                                         </p:tgtEl>
                                       </p:cMediaNode>
                                     </p:audio>
@@ -14494,7 +14494,7 @@
                                           </p:endCondLst>
                                         </p:cTn>
                                         <p:tgtEl>
-                                          <p:sndTgt r:embed="rIdSnd4" name="win.wav"/>
+                                          <p:sndTgt r:embed="rIdSnd7" name="win.wav"/>
                                         </p:tgtEl>
                                       </p:cMediaNode>
                                     </p:audio>
@@ -15209,7 +15209,7 @@
                                           </p:endCondLst>
                                         </p:cTn>
                                         <p:tgtEl>
-                                          <p:sndTgt r:embed="rIdSnd1" name="pop.wav"/>
+                                          <p:sndTgt r:embed="rIdSnd1" name="pluck1.wav"/>
                                         </p:tgtEl>
                                       </p:cMediaNode>
                                     </p:audio>
@@ -15281,7 +15281,7 @@
                                           </p:endCondLst>
                                         </p:cTn>
                                         <p:tgtEl>
-                                          <p:sndTgt r:embed="rIdSnd2" name="ding.wav"/>
+                                          <p:sndTgt r:embed="rIdSnd2" name="bell1.wav"/>
                                         </p:tgtEl>
                                       </p:cMediaNode>
                                     </p:audio>
@@ -15353,7 +15353,7 @@
                                           </p:endCondLst>
                                         </p:cTn>
                                         <p:tgtEl>
-                                          <p:sndTgt r:embed="rIdSnd3" name="tick.wav"/>
+                                          <p:sndTgt r:embed="rIdSnd3" name="bloop.wav"/>
                                         </p:tgtEl>
                                       </p:cMediaNode>
                                     </p:audio>
@@ -15425,7 +15425,7 @@
                                           </p:endCondLst>
                                         </p:cTn>
                                         <p:tgtEl>
-                                          <p:sndTgt r:embed="rIdSnd1" name="pop.wav"/>
+                                          <p:sndTgt r:embed="rIdSnd4" name="pluck2.wav"/>
                                         </p:tgtEl>
                                       </p:cMediaNode>
                                     </p:audio>
@@ -15497,7 +15497,7 @@
                                           </p:endCondLst>
                                         </p:cTn>
                                         <p:tgtEl>
-                                          <p:sndTgt r:embed="rIdSnd2" name="ding.wav"/>
+                                          <p:sndTgt r:embed="rIdSnd5" name="bell2.wav"/>
                                         </p:tgtEl>
                                       </p:cMediaNode>
                                     </p:audio>
@@ -15569,7 +15569,7 @@
                                           </p:endCondLst>
                                         </p:cTn>
                                         <p:tgtEl>
-                                          <p:sndTgt r:embed="rIdSnd3" name="tick.wav"/>
+                                          <p:sndTgt r:embed="rIdSnd6" name="whoosh.wav"/>
                                         </p:tgtEl>
                                       </p:cMediaNode>
                                     </p:audio>
@@ -15641,7 +15641,7 @@
                                           </p:endCondLst>
                                         </p:cTn>
                                         <p:tgtEl>
-                                          <p:sndTgt r:embed="rIdSnd4" name="win.wav"/>
+                                          <p:sndTgt r:embed="rIdSnd7" name="win.wav"/>
                                         </p:tgtEl>
                                       </p:cMediaNode>
                                     </p:audio>
@@ -16356,7 +16356,7 @@
                                           </p:endCondLst>
                                         </p:cTn>
                                         <p:tgtEl>
-                                          <p:sndTgt r:embed="rIdSnd1" name="pop.wav"/>
+                                          <p:sndTgt r:embed="rIdSnd1" name="pluck1.wav"/>
                                         </p:tgtEl>
                                       </p:cMediaNode>
                                     </p:audio>
@@ -16428,7 +16428,7 @@
                                           </p:endCondLst>
                                         </p:cTn>
                                         <p:tgtEl>
-                                          <p:sndTgt r:embed="rIdSnd2" name="ding.wav"/>
+                                          <p:sndTgt r:embed="rIdSnd2" name="bell1.wav"/>
                                         </p:tgtEl>
                                       </p:cMediaNode>
                                     </p:audio>
@@ -16500,7 +16500,7 @@
                                           </p:endCondLst>
                                         </p:cTn>
                                         <p:tgtEl>
-                                          <p:sndTgt r:embed="rIdSnd3" name="tick.wav"/>
+                                          <p:sndTgt r:embed="rIdSnd3" name="bloop.wav"/>
                                         </p:tgtEl>
                                       </p:cMediaNode>
                                     </p:audio>
@@ -16572,7 +16572,7 @@
                                           </p:endCondLst>
                                         </p:cTn>
                                         <p:tgtEl>
-                                          <p:sndTgt r:embed="rIdSnd1" name="pop.wav"/>
+                                          <p:sndTgt r:embed="rIdSnd4" name="pluck2.wav"/>
                                         </p:tgtEl>
                                       </p:cMediaNode>
                                     </p:audio>
@@ -16644,7 +16644,7 @@
                                           </p:endCondLst>
                                         </p:cTn>
                                         <p:tgtEl>
-                                          <p:sndTgt r:embed="rIdSnd2" name="ding.wav"/>
+                                          <p:sndTgt r:embed="rIdSnd5" name="bell2.wav"/>
                                         </p:tgtEl>
                                       </p:cMediaNode>
                                     </p:audio>
@@ -16716,7 +16716,7 @@
                                           </p:endCondLst>
                                         </p:cTn>
                                         <p:tgtEl>
-                                          <p:sndTgt r:embed="rIdSnd3" name="tick.wav"/>
+                                          <p:sndTgt r:embed="rIdSnd6" name="whoosh.wav"/>
                                         </p:tgtEl>
                                       </p:cMediaNode>
                                     </p:audio>
@@ -16788,7 +16788,7 @@
                                           </p:endCondLst>
                                         </p:cTn>
                                         <p:tgtEl>
-                                          <p:sndTgt r:embed="rIdSnd4" name="win.wav"/>
+                                          <p:sndTgt r:embed="rIdSnd7" name="win.wav"/>
                                         </p:tgtEl>
                                       </p:cMediaNode>
                                     </p:audio>
@@ -17503,7 +17503,7 @@
                                           </p:endCondLst>
                                         </p:cTn>
                                         <p:tgtEl>
-                                          <p:sndTgt r:embed="rIdSnd1" name="pop.wav"/>
+                                          <p:sndTgt r:embed="rIdSnd1" name="pluck1.wav"/>
                                         </p:tgtEl>
                                       </p:cMediaNode>
                                     </p:audio>
@@ -17575,7 +17575,7 @@
                                           </p:endCondLst>
                                         </p:cTn>
                                         <p:tgtEl>
-                                          <p:sndTgt r:embed="rIdSnd2" name="ding.wav"/>
+                                          <p:sndTgt r:embed="rIdSnd2" name="bell1.wav"/>
                                         </p:tgtEl>
                                       </p:cMediaNode>
                                     </p:audio>
@@ -17647,7 +17647,7 @@
                                           </p:endCondLst>
                                         </p:cTn>
                                         <p:tgtEl>
-                                          <p:sndTgt r:embed="rIdSnd3" name="tick.wav"/>
+                                          <p:sndTgt r:embed="rIdSnd3" name="bloop.wav"/>
                                         </p:tgtEl>
                                       </p:cMediaNode>
                                     </p:audio>
@@ -17719,7 +17719,7 @@
                                           </p:endCondLst>
                                         </p:cTn>
                                         <p:tgtEl>
-                                          <p:sndTgt r:embed="rIdSnd1" name="pop.wav"/>
+                                          <p:sndTgt r:embed="rIdSnd4" name="pluck2.wav"/>
                                         </p:tgtEl>
                                       </p:cMediaNode>
                                     </p:audio>
@@ -17791,7 +17791,7 @@
                                           </p:endCondLst>
                                         </p:cTn>
                                         <p:tgtEl>
-                                          <p:sndTgt r:embed="rIdSnd2" name="ding.wav"/>
+                                          <p:sndTgt r:embed="rIdSnd5" name="bell2.wav"/>
                                         </p:tgtEl>
                                       </p:cMediaNode>
                                     </p:audio>
@@ -17863,7 +17863,7 @@
                                           </p:endCondLst>
                                         </p:cTn>
                                         <p:tgtEl>
-                                          <p:sndTgt r:embed="rIdSnd3" name="tick.wav"/>
+                                          <p:sndTgt r:embed="rIdSnd6" name="whoosh.wav"/>
                                         </p:tgtEl>
                                       </p:cMediaNode>
                                     </p:audio>
@@ -17935,7 +17935,7 @@
                                           </p:endCondLst>
                                         </p:cTn>
                                         <p:tgtEl>
-                                          <p:sndTgt r:embed="rIdSnd4" name="win.wav"/>
+                                          <p:sndTgt r:embed="rIdSnd7" name="win.wav"/>
                                         </p:tgtEl>
                                       </p:cMediaNode>
                                     </p:audio>
@@ -18650,7 +18650,7 @@
                                           </p:endCondLst>
                                         </p:cTn>
                                         <p:tgtEl>
-                                          <p:sndTgt r:embed="rIdSnd1" name="pop.wav"/>
+                                          <p:sndTgt r:embed="rIdSnd1" name="pluck1.wav"/>
                                         </p:tgtEl>
                                       </p:cMediaNode>
                                     </p:audio>
@@ -18722,7 +18722,7 @@
                                           </p:endCondLst>
                                         </p:cTn>
                                         <p:tgtEl>
-                                          <p:sndTgt r:embed="rIdSnd2" name="ding.wav"/>
+                                          <p:sndTgt r:embed="rIdSnd2" name="bell1.wav"/>
                                         </p:tgtEl>
                                       </p:cMediaNode>
                                     </p:audio>
@@ -18794,7 +18794,7 @@
                                           </p:endCondLst>
                                         </p:cTn>
                                         <p:tgtEl>
-                                          <p:sndTgt r:embed="rIdSnd3" name="tick.wav"/>
+                                          <p:sndTgt r:embed="rIdSnd3" name="bloop.wav"/>
                                         </p:tgtEl>
                                       </p:cMediaNode>
                                     </p:audio>
@@ -18866,7 +18866,7 @@
                                           </p:endCondLst>
                                         </p:cTn>
                                         <p:tgtEl>
-                                          <p:sndTgt r:embed="rIdSnd1" name="pop.wav"/>
+                                          <p:sndTgt r:embed="rIdSnd4" name="pluck2.wav"/>
                                         </p:tgtEl>
                                       </p:cMediaNode>
                                     </p:audio>
@@ -18938,7 +18938,7 @@
                                           </p:endCondLst>
                                         </p:cTn>
                                         <p:tgtEl>
-                                          <p:sndTgt r:embed="rIdSnd2" name="ding.wav"/>
+                                          <p:sndTgt r:embed="rIdSnd5" name="bell2.wav"/>
                                         </p:tgtEl>
                                       </p:cMediaNode>
                                     </p:audio>
@@ -19010,7 +19010,7 @@
                                           </p:endCondLst>
                                         </p:cTn>
                                         <p:tgtEl>
-                                          <p:sndTgt r:embed="rIdSnd3" name="tick.wav"/>
+                                          <p:sndTgt r:embed="rIdSnd6" name="whoosh.wav"/>
                                         </p:tgtEl>
                                       </p:cMediaNode>
                                     </p:audio>
@@ -19082,7 +19082,7 @@
                                           </p:endCondLst>
                                         </p:cTn>
                                         <p:tgtEl>
-                                          <p:sndTgt r:embed="rIdSnd4" name="win.wav"/>
+                                          <p:sndTgt r:embed="rIdSnd7" name="win.wav"/>
                                         </p:tgtEl>
                                       </p:cMediaNode>
                                     </p:audio>
@@ -19797,7 +19797,7 @@
                                           </p:endCondLst>
                                         </p:cTn>
                                         <p:tgtEl>
-                                          <p:sndTgt r:embed="rIdSnd1" name="pop.wav"/>
+                                          <p:sndTgt r:embed="rIdSnd1" name="pluck1.wav"/>
                                         </p:tgtEl>
                                       </p:cMediaNode>
                                     </p:audio>
@@ -19869,7 +19869,7 @@
                                           </p:endCondLst>
                                         </p:cTn>
                                         <p:tgtEl>
-                                          <p:sndTgt r:embed="rIdSnd2" name="ding.wav"/>
+                                          <p:sndTgt r:embed="rIdSnd2" name="bell1.wav"/>
                                         </p:tgtEl>
                                       </p:cMediaNode>
                                     </p:audio>
@@ -19941,7 +19941,7 @@
                                           </p:endCondLst>
                                         </p:cTn>
                                         <p:tgtEl>
-                                          <p:sndTgt r:embed="rIdSnd3" name="tick.wav"/>
+                                          <p:sndTgt r:embed="rIdSnd3" name="bloop.wav"/>
                                         </p:tgtEl>
                                       </p:cMediaNode>
                                     </p:audio>
@@ -20013,7 +20013,7 @@
                                           </p:endCondLst>
                                         </p:cTn>
                                         <p:tgtEl>
-                                          <p:sndTgt r:embed="rIdSnd1" name="pop.wav"/>
+                                          <p:sndTgt r:embed="rIdSnd4" name="pluck2.wav"/>
                                         </p:tgtEl>
                                       </p:cMediaNode>
                                     </p:audio>
@@ -20085,7 +20085,7 @@
                                           </p:endCondLst>
                                         </p:cTn>
                                         <p:tgtEl>
-                                          <p:sndTgt r:embed="rIdSnd2" name="ding.wav"/>
+                                          <p:sndTgt r:embed="rIdSnd5" name="bell2.wav"/>
                                         </p:tgtEl>
                                       </p:cMediaNode>
                                     </p:audio>
@@ -20157,7 +20157,7 @@
                                           </p:endCondLst>
                                         </p:cTn>
                                         <p:tgtEl>
-                                          <p:sndTgt r:embed="rIdSnd3" name="tick.wav"/>
+                                          <p:sndTgt r:embed="rIdSnd6" name="whoosh.wav"/>
                                         </p:tgtEl>
                                       </p:cMediaNode>
                                     </p:audio>
@@ -20229,7 +20229,7 @@
                                           </p:endCondLst>
                                         </p:cTn>
                                         <p:tgtEl>
-                                          <p:sndTgt r:embed="rIdSnd4" name="win.wav"/>
+                                          <p:sndTgt r:embed="rIdSnd7" name="win.wav"/>
                                         </p:tgtEl>
                                       </p:cMediaNode>
                                     </p:audio>
@@ -20944,7 +20944,7 @@
                                           </p:endCondLst>
                                         </p:cTn>
                                         <p:tgtEl>
-                                          <p:sndTgt r:embed="rIdSnd1" name="pop.wav"/>
+                                          <p:sndTgt r:embed="rIdSnd1" name="pluck1.wav"/>
                                         </p:tgtEl>
                                       </p:cMediaNode>
                                     </p:audio>
@@ -21016,7 +21016,7 @@
                                           </p:endCondLst>
                                         </p:cTn>
                                         <p:tgtEl>
-                                          <p:sndTgt r:embed="rIdSnd2" name="ding.wav"/>
+                                          <p:sndTgt r:embed="rIdSnd2" name="bell1.wav"/>
                                         </p:tgtEl>
                                       </p:cMediaNode>
                                     </p:audio>
@@ -21088,7 +21088,7 @@
                                           </p:endCondLst>
                                         </p:cTn>
                                         <p:tgtEl>
-                                          <p:sndTgt r:embed="rIdSnd3" name="tick.wav"/>
+                                          <p:sndTgt r:embed="rIdSnd3" name="bloop.wav"/>
                                         </p:tgtEl>
                                       </p:cMediaNode>
                                     </p:audio>
@@ -21160,7 +21160,7 @@
                                           </p:endCondLst>
                                         </p:cTn>
                                         <p:tgtEl>
-                                          <p:sndTgt r:embed="rIdSnd1" name="pop.wav"/>
+                                          <p:sndTgt r:embed="rIdSnd4" name="pluck2.wav"/>
                                         </p:tgtEl>
                                       </p:cMediaNode>
                                     </p:audio>
@@ -21232,7 +21232,7 @@
                                           </p:endCondLst>
                                         </p:cTn>
                                         <p:tgtEl>
-                                          <p:sndTgt r:embed="rIdSnd2" name="ding.wav"/>
+                                          <p:sndTgt r:embed="rIdSnd5" name="bell2.wav"/>
                                         </p:tgtEl>
                                       </p:cMediaNode>
                                     </p:audio>
@@ -21304,7 +21304,7 @@
                                           </p:endCondLst>
                                         </p:cTn>
                                         <p:tgtEl>
-                                          <p:sndTgt r:embed="rIdSnd3" name="tick.wav"/>
+                                          <p:sndTgt r:embed="rIdSnd6" name="whoosh.wav"/>
                                         </p:tgtEl>
                                       </p:cMediaNode>
                                     </p:audio>
@@ -21376,7 +21376,7 @@
                                           </p:endCondLst>
                                         </p:cTn>
                                         <p:tgtEl>
-                                          <p:sndTgt r:embed="rIdSnd4" name="win.wav"/>
+                                          <p:sndTgt r:embed="rIdSnd7" name="win.wav"/>
                                         </p:tgtEl>
                                       </p:cMediaNode>
                                     </p:audio>
@@ -22091,7 +22091,7 @@
                                           </p:endCondLst>
                                         </p:cTn>
                                         <p:tgtEl>
-                                          <p:sndTgt r:embed="rIdSnd1" name="pop.wav"/>
+                                          <p:sndTgt r:embed="rIdSnd1" name="pluck1.wav"/>
                                         </p:tgtEl>
                                       </p:cMediaNode>
                                     </p:audio>
@@ -22163,7 +22163,7 @@
                                           </p:endCondLst>
                                         </p:cTn>
                                         <p:tgtEl>
-                                          <p:sndTgt r:embed="rIdSnd2" name="ding.wav"/>
+                                          <p:sndTgt r:embed="rIdSnd2" name="bell1.wav"/>
                                         </p:tgtEl>
                                       </p:cMediaNode>
                                     </p:audio>
@@ -22235,7 +22235,7 @@
                                           </p:endCondLst>
                                         </p:cTn>
                                         <p:tgtEl>
-                                          <p:sndTgt r:embed="rIdSnd3" name="tick.wav"/>
+                                          <p:sndTgt r:embed="rIdSnd3" name="bloop.wav"/>
                                         </p:tgtEl>
                                       </p:cMediaNode>
                                     </p:audio>
@@ -22307,7 +22307,7 @@
                                           </p:endCondLst>
                                         </p:cTn>
                                         <p:tgtEl>
-                                          <p:sndTgt r:embed="rIdSnd1" name="pop.wav"/>
+                                          <p:sndTgt r:embed="rIdSnd4" name="pluck2.wav"/>
                                         </p:tgtEl>
                                       </p:cMediaNode>
                                     </p:audio>
@@ -22379,7 +22379,7 @@
                                           </p:endCondLst>
                                         </p:cTn>
                                         <p:tgtEl>
-                                          <p:sndTgt r:embed="rIdSnd2" name="ding.wav"/>
+                                          <p:sndTgt r:embed="rIdSnd5" name="bell2.wav"/>
                                         </p:tgtEl>
                                       </p:cMediaNode>
                                     </p:audio>
@@ -22451,7 +22451,7 @@
                                           </p:endCondLst>
                                         </p:cTn>
                                         <p:tgtEl>
-                                          <p:sndTgt r:embed="rIdSnd3" name="tick.wav"/>
+                                          <p:sndTgt r:embed="rIdSnd6" name="whoosh.wav"/>
                                         </p:tgtEl>
                                       </p:cMediaNode>
                                     </p:audio>
@@ -22523,7 +22523,7 @@
                                           </p:endCondLst>
                                         </p:cTn>
                                         <p:tgtEl>
-                                          <p:sndTgt r:embed="rIdSnd4" name="win.wav"/>
+                                          <p:sndTgt r:embed="rIdSnd7" name="win.wav"/>
                                         </p:tgtEl>
                                       </p:cMediaNode>
                                     </p:audio>
@@ -23238,7 +23238,7 @@
                                           </p:endCondLst>
                                         </p:cTn>
                                         <p:tgtEl>
-                                          <p:sndTgt r:embed="rIdSnd1" name="pop.wav"/>
+                                          <p:sndTgt r:embed="rIdSnd1" name="pluck1.wav"/>
                                         </p:tgtEl>
                                       </p:cMediaNode>
                                     </p:audio>
@@ -23310,7 +23310,7 @@
                                           </p:endCondLst>
                                         </p:cTn>
                                         <p:tgtEl>
-                                          <p:sndTgt r:embed="rIdSnd2" name="ding.wav"/>
+                                          <p:sndTgt r:embed="rIdSnd2" name="bell1.wav"/>
                                         </p:tgtEl>
                                       </p:cMediaNode>
                                     </p:audio>
@@ -23382,7 +23382,7 @@
                                           </p:endCondLst>
                                         </p:cTn>
                                         <p:tgtEl>
-                                          <p:sndTgt r:embed="rIdSnd3" name="tick.wav"/>
+                                          <p:sndTgt r:embed="rIdSnd3" name="bloop.wav"/>
                                         </p:tgtEl>
                                       </p:cMediaNode>
                                     </p:audio>
@@ -23454,7 +23454,7 @@
                                           </p:endCondLst>
                                         </p:cTn>
                                         <p:tgtEl>
-                                          <p:sndTgt r:embed="rIdSnd1" name="pop.wav"/>
+                                          <p:sndTgt r:embed="rIdSnd4" name="pluck2.wav"/>
                                         </p:tgtEl>
                                       </p:cMediaNode>
                                     </p:audio>
@@ -23526,7 +23526,7 @@
                                           </p:endCondLst>
                                         </p:cTn>
                                         <p:tgtEl>
-                                          <p:sndTgt r:embed="rIdSnd2" name="ding.wav"/>
+                                          <p:sndTgt r:embed="rIdSnd5" name="bell2.wav"/>
                                         </p:tgtEl>
                                       </p:cMediaNode>
                                     </p:audio>
@@ -23598,7 +23598,7 @@
                                           </p:endCondLst>
                                         </p:cTn>
                                         <p:tgtEl>
-                                          <p:sndTgt r:embed="rIdSnd3" name="tick.wav"/>
+                                          <p:sndTgt r:embed="rIdSnd6" name="whoosh.wav"/>
                                         </p:tgtEl>
                                       </p:cMediaNode>
                                     </p:audio>
@@ -23670,7 +23670,7 @@
                                           </p:endCondLst>
                                         </p:cTn>
                                         <p:tgtEl>
-                                          <p:sndTgt r:embed="rIdSnd4" name="win.wav"/>
+                                          <p:sndTgt r:embed="rIdSnd7" name="win.wav"/>
                                         </p:tgtEl>
                                       </p:cMediaNode>
                                     </p:audio>
@@ -24385,7 +24385,7 @@
                                           </p:endCondLst>
                                         </p:cTn>
                                         <p:tgtEl>
-                                          <p:sndTgt r:embed="rIdSnd1" name="pop.wav"/>
+                                          <p:sndTgt r:embed="rIdSnd1" name="pluck1.wav"/>
                                         </p:tgtEl>
                                       </p:cMediaNode>
                                     </p:audio>
@@ -24457,7 +24457,7 @@
                                           </p:endCondLst>
                                         </p:cTn>
                                         <p:tgtEl>
-                                          <p:sndTgt r:embed="rIdSnd2" name="ding.wav"/>
+                                          <p:sndTgt r:embed="rIdSnd2" name="bell1.wav"/>
                                         </p:tgtEl>
                                       </p:cMediaNode>
                                     </p:audio>
@@ -24529,7 +24529,7 @@
                                           </p:endCondLst>
                                         </p:cTn>
                                         <p:tgtEl>
-                                          <p:sndTgt r:embed="rIdSnd3" name="tick.wav"/>
+                                          <p:sndTgt r:embed="rIdSnd3" name="bloop.wav"/>
                                         </p:tgtEl>
                                       </p:cMediaNode>
                                     </p:audio>
@@ -24601,7 +24601,7 @@
                                           </p:endCondLst>
                                         </p:cTn>
                                         <p:tgtEl>
-                                          <p:sndTgt r:embed="rIdSnd1" name="pop.wav"/>
+                                          <p:sndTgt r:embed="rIdSnd4" name="pluck2.wav"/>
                                         </p:tgtEl>
                                       </p:cMediaNode>
                                     </p:audio>
@@ -24673,7 +24673,7 @@
                                           </p:endCondLst>
                                         </p:cTn>
                                         <p:tgtEl>
-                                          <p:sndTgt r:embed="rIdSnd2" name="ding.wav"/>
+                                          <p:sndTgt r:embed="rIdSnd5" name="bell2.wav"/>
                                         </p:tgtEl>
                                       </p:cMediaNode>
                                     </p:audio>
@@ -24745,7 +24745,7 @@
                                           </p:endCondLst>
                                         </p:cTn>
                                         <p:tgtEl>
-                                          <p:sndTgt r:embed="rIdSnd3" name="tick.wav"/>
+                                          <p:sndTgt r:embed="rIdSnd6" name="whoosh.wav"/>
                                         </p:tgtEl>
                                       </p:cMediaNode>
                                     </p:audio>
@@ -24817,7 +24817,7 @@
                                           </p:endCondLst>
                                         </p:cTn>
                                         <p:tgtEl>
-                                          <p:sndTgt r:embed="rIdSnd4" name="win.wav"/>
+                                          <p:sndTgt r:embed="rIdSnd7" name="win.wav"/>
                                         </p:tgtEl>
                                       </p:cMediaNode>
                                     </p:audio>
@@ -25532,7 +25532,7 @@
                                           </p:endCondLst>
                                         </p:cTn>
                                         <p:tgtEl>
-                                          <p:sndTgt r:embed="rIdSnd1" name="pop.wav"/>
+                                          <p:sndTgt r:embed="rIdSnd1" name="pluck1.wav"/>
                                         </p:tgtEl>
                                       </p:cMediaNode>
                                     </p:audio>
@@ -25604,7 +25604,7 @@
                                           </p:endCondLst>
                                         </p:cTn>
                                         <p:tgtEl>
-                                          <p:sndTgt r:embed="rIdSnd2" name="ding.wav"/>
+                                          <p:sndTgt r:embed="rIdSnd2" name="bell1.wav"/>
                                         </p:tgtEl>
                                       </p:cMediaNode>
                                     </p:audio>
@@ -25676,7 +25676,7 @@
                                           </p:endCondLst>
                                         </p:cTn>
                                         <p:tgtEl>
-                                          <p:sndTgt r:embed="rIdSnd3" name="tick.wav"/>
+                                          <p:sndTgt r:embed="rIdSnd3" name="bloop.wav"/>
                                         </p:tgtEl>
                                       </p:cMediaNode>
                                     </p:audio>
@@ -25748,7 +25748,7 @@
                                           </p:endCondLst>
                                         </p:cTn>
                                         <p:tgtEl>
-                                          <p:sndTgt r:embed="rIdSnd1" name="pop.wav"/>
+                                          <p:sndTgt r:embed="rIdSnd4" name="pluck2.wav"/>
                                         </p:tgtEl>
                                       </p:cMediaNode>
                                     </p:audio>
@@ -25820,7 +25820,7 @@
                                           </p:endCondLst>
                                         </p:cTn>
                                         <p:tgtEl>
-                                          <p:sndTgt r:embed="rIdSnd2" name="ding.wav"/>
+                                          <p:sndTgt r:embed="rIdSnd5" name="bell2.wav"/>
                                         </p:tgtEl>
                                       </p:cMediaNode>
                                     </p:audio>
@@ -25892,7 +25892,7 @@
                                           </p:endCondLst>
                                         </p:cTn>
                                         <p:tgtEl>
-                                          <p:sndTgt r:embed="rIdSnd3" name="tick.wav"/>
+                                          <p:sndTgt r:embed="rIdSnd6" name="whoosh.wav"/>
                                         </p:tgtEl>
                                       </p:cMediaNode>
                                     </p:audio>
@@ -25964,7 +25964,7 @@
                                           </p:endCondLst>
                                         </p:cTn>
                                         <p:tgtEl>
-                                          <p:sndTgt r:embed="rIdSnd4" name="win.wav"/>
+                                          <p:sndTgt r:embed="rIdSnd7" name="win.wav"/>
                                         </p:tgtEl>
                                       </p:cMediaNode>
                                     </p:audio>
@@ -26679,7 +26679,7 @@
                                           </p:endCondLst>
                                         </p:cTn>
                                         <p:tgtEl>
-                                          <p:sndTgt r:embed="rIdSnd1" name="pop.wav"/>
+                                          <p:sndTgt r:embed="rIdSnd1" name="pluck1.wav"/>
                                         </p:tgtEl>
                                       </p:cMediaNode>
                                     </p:audio>
@@ -26751,7 +26751,7 @@
                                           </p:endCondLst>
                                         </p:cTn>
                                         <p:tgtEl>
-                                          <p:sndTgt r:embed="rIdSnd2" name="ding.wav"/>
+                                          <p:sndTgt r:embed="rIdSnd2" name="bell1.wav"/>
                                         </p:tgtEl>
                                       </p:cMediaNode>
                                     </p:audio>
@@ -26823,7 +26823,7 @@
                                           </p:endCondLst>
                                         </p:cTn>
                                         <p:tgtEl>
-                                          <p:sndTgt r:embed="rIdSnd3" name="tick.wav"/>
+                                          <p:sndTgt r:embed="rIdSnd3" name="bloop.wav"/>
                                         </p:tgtEl>
                                       </p:cMediaNode>
                                     </p:audio>
@@ -26895,7 +26895,7 @@
                                           </p:endCondLst>
                                         </p:cTn>
                                         <p:tgtEl>
-                                          <p:sndTgt r:embed="rIdSnd1" name="pop.wav"/>
+                                          <p:sndTgt r:embed="rIdSnd4" name="pluck2.wav"/>
                                         </p:tgtEl>
                                       </p:cMediaNode>
                                     </p:audio>
@@ -26967,7 +26967,7 @@
                                           </p:endCondLst>
                                         </p:cTn>
                                         <p:tgtEl>
-                                          <p:sndTgt r:embed="rIdSnd2" name="ding.wav"/>
+                                          <p:sndTgt r:embed="rIdSnd5" name="bell2.wav"/>
                                         </p:tgtEl>
                                       </p:cMediaNode>
                                     </p:audio>
@@ -27039,7 +27039,7 @@
                                           </p:endCondLst>
                                         </p:cTn>
                                         <p:tgtEl>
-                                          <p:sndTgt r:embed="rIdSnd3" name="tick.wav"/>
+                                          <p:sndTgt r:embed="rIdSnd6" name="whoosh.wav"/>
                                         </p:tgtEl>
                                       </p:cMediaNode>
                                     </p:audio>
@@ -27111,7 +27111,7 @@
                                           </p:endCondLst>
                                         </p:cTn>
                                         <p:tgtEl>
-                                          <p:sndTgt r:embed="rIdSnd4" name="win.wav"/>
+                                          <p:sndTgt r:embed="rIdSnd7" name="win.wav"/>
                                         </p:tgtEl>
                                       </p:cMediaNode>
                                     </p:audio>
@@ -27826,7 +27826,7 @@
                                           </p:endCondLst>
                                         </p:cTn>
                                         <p:tgtEl>
-                                          <p:sndTgt r:embed="rIdSnd1" name="pop.wav"/>
+                                          <p:sndTgt r:embed="rIdSnd1" name="pluck1.wav"/>
                                         </p:tgtEl>
                                       </p:cMediaNode>
                                     </p:audio>
@@ -27898,7 +27898,7 @@
                                           </p:endCondLst>
                                         </p:cTn>
                                         <p:tgtEl>
-                                          <p:sndTgt r:embed="rIdSnd2" name="ding.wav"/>
+                                          <p:sndTgt r:embed="rIdSnd2" name="bell1.wav"/>
                                         </p:tgtEl>
                                       </p:cMediaNode>
                                     </p:audio>
@@ -27970,7 +27970,7 @@
                                           </p:endCondLst>
                                         </p:cTn>
                                         <p:tgtEl>
-                                          <p:sndTgt r:embed="rIdSnd3" name="tick.wav"/>
+                                          <p:sndTgt r:embed="rIdSnd3" name="bloop.wav"/>
                                         </p:tgtEl>
                                       </p:cMediaNode>
                                     </p:audio>
@@ -28042,7 +28042,7 @@
                                           </p:endCondLst>
                                         </p:cTn>
                                         <p:tgtEl>
-                                          <p:sndTgt r:embed="rIdSnd1" name="pop.wav"/>
+                                          <p:sndTgt r:embed="rIdSnd4" name="pluck2.wav"/>
                                         </p:tgtEl>
                                       </p:cMediaNode>
                                     </p:audio>
@@ -28114,7 +28114,7 @@
                                           </p:endCondLst>
                                         </p:cTn>
                                         <p:tgtEl>
-                                          <p:sndTgt r:embed="rIdSnd2" name="ding.wav"/>
+                                          <p:sndTgt r:embed="rIdSnd5" name="bell2.wav"/>
                                         </p:tgtEl>
                                       </p:cMediaNode>
                                     </p:audio>
@@ -28186,7 +28186,7 @@
                                           </p:endCondLst>
                                         </p:cTn>
                                         <p:tgtEl>
-                                          <p:sndTgt r:embed="rIdSnd3" name="tick.wav"/>
+                                          <p:sndTgt r:embed="rIdSnd6" name="whoosh.wav"/>
                                         </p:tgtEl>
                                       </p:cMediaNode>
                                     </p:audio>
@@ -28258,7 +28258,7 @@
                                           </p:endCondLst>
                                         </p:cTn>
                                         <p:tgtEl>
-                                          <p:sndTgt r:embed="rIdSnd4" name="win.wav"/>
+                                          <p:sndTgt r:embed="rIdSnd7" name="win.wav"/>
                                         </p:tgtEl>
                                       </p:cMediaNode>
                                     </p:audio>
@@ -29101,7 +29101,7 @@
                                           </p:endCondLst>
                                         </p:cTn>
                                         <p:tgtEl>
-                                          <p:sndTgt r:embed="rIdSnd1" name="pop.wav"/>
+                                          <p:sndTgt r:embed="rIdSnd1" name="pluck1.wav"/>
                                         </p:tgtEl>
                                       </p:cMediaNode>
                                     </p:audio>
@@ -29173,7 +29173,7 @@
                                           </p:endCondLst>
                                         </p:cTn>
                                         <p:tgtEl>
-                                          <p:sndTgt r:embed="rIdSnd2" name="ding.wav"/>
+                                          <p:sndTgt r:embed="rIdSnd2" name="bell1.wav"/>
                                         </p:tgtEl>
                                       </p:cMediaNode>
                                     </p:audio>
@@ -29245,7 +29245,7 @@
                                           </p:endCondLst>
                                         </p:cTn>
                                         <p:tgtEl>
-                                          <p:sndTgt r:embed="rIdSnd3" name="tick.wav"/>
+                                          <p:sndTgt r:embed="rIdSnd3" name="bloop.wav"/>
                                         </p:tgtEl>
                                       </p:cMediaNode>
                                     </p:audio>
@@ -29317,7 +29317,7 @@
                                           </p:endCondLst>
                                         </p:cTn>
                                         <p:tgtEl>
-                                          <p:sndTgt r:embed="rIdSnd1" name="pop.wav"/>
+                                          <p:sndTgt r:embed="rIdSnd4" name="pluck2.wav"/>
                                         </p:tgtEl>
                                       </p:cMediaNode>
                                     </p:audio>
@@ -29389,7 +29389,7 @@
                                           </p:endCondLst>
                                         </p:cTn>
                                         <p:tgtEl>
-                                          <p:sndTgt r:embed="rIdSnd2" name="ding.wav"/>
+                                          <p:sndTgt r:embed="rIdSnd5" name="bell2.wav"/>
                                         </p:tgtEl>
                                       </p:cMediaNode>
                                     </p:audio>
@@ -29461,7 +29461,7 @@
                                           </p:endCondLst>
                                         </p:cTn>
                                         <p:tgtEl>
-                                          <p:sndTgt r:embed="rIdSnd3" name="tick.wav"/>
+                                          <p:sndTgt r:embed="rIdSnd3" name="bloop.wav"/>
                                         </p:tgtEl>
                                       </p:cMediaNode>
                                     </p:audio>
@@ -29533,7 +29533,7 @@
                                           </p:endCondLst>
                                         </p:cTn>
                                         <p:tgtEl>
-                                          <p:sndTgt r:embed="rIdSnd1" name="pop.wav"/>
+                                          <p:sndTgt r:embed="rIdSnd6" name="pluck3.wav"/>
                                         </p:tgtEl>
                                       </p:cMediaNode>
                                     </p:audio>
@@ -29605,7 +29605,7 @@
                                           </p:endCondLst>
                                         </p:cTn>
                                         <p:tgtEl>
-                                          <p:sndTgt r:embed="rIdSnd2" name="ding.wav"/>
+                                          <p:sndTgt r:embed="rIdSnd7" name="bell3.wav"/>
                                         </p:tgtEl>
                                       </p:cMediaNode>
                                     </p:audio>
@@ -29677,7 +29677,7 @@
                                           </p:endCondLst>
                                         </p:cTn>
                                         <p:tgtEl>
-                                          <p:sndTgt r:embed="rIdSnd3" name="tick.wav"/>
+                                          <p:sndTgt r:embed="rIdSnd8" name="whoosh.wav"/>
                                         </p:tgtEl>
                                       </p:cMediaNode>
                                     </p:audio>
@@ -29749,7 +29749,7 @@
                                           </p:endCondLst>
                                         </p:cTn>
                                         <p:tgtEl>
-                                          <p:sndTgt r:embed="rIdSnd4" name="win.wav"/>
+                                          <p:sndTgt r:embed="rIdSnd9" name="win.wav"/>
                                         </p:tgtEl>
                                       </p:cMediaNode>
                                     </p:audio>
